--- a/templates/04-panels.pptx
+++ b/templates/04-panels.pptx
@@ -3399,7 +3399,7 @@
         <p:spPr>
           <a:xfrm>
             <a:off x="666750" y="5143500"/>
-            <a:ext cx="2857500" cy="381000"/>
+            <a:ext cx="5715000" cy="381000"/>
           </a:xfrm>
           <a:prstGeom prst="rect">
             <a:avLst/>

--- a/templates/04-panels.pptx
+++ b/templates/04-panels.pptx
@@ -3497,7 +3497,7 @@
               </a:lnSpc>
             </a:pPr>
             <a:r>
-              <a:rPr sz="12750" b="1">
+              <a:rPr sz="11625" b="1">
                 <a:solidFill>
                   <a:srgbClr val="3FA9F5"/>
                 </a:solidFill>
@@ -3513,7 +3513,7 @@
               </a:lnSpc>
             </a:pPr>
             <a:r>
-              <a:rPr sz="12750" b="1">
+              <a:rPr sz="11625" b="1">
                 <a:solidFill>
                   <a:srgbClr val="3FA9F5"/>
                 </a:solidFill>
@@ -7371,8 +7371,8 @@
         </p:nvSpPr>
         <p:spPr>
           <a:xfrm>
-            <a:off x="666750" y="4000500"/>
-            <a:ext cx="8953500" cy="3143250"/>
+            <a:off x="666750" y="2857500"/>
+            <a:ext cx="8953500" cy="4095750"/>
           </a:xfrm>
           <a:prstGeom prst="rect">
             <a:avLst/>
@@ -7391,7 +7391,7 @@
               </a:lnSpc>
             </a:pPr>
             <a:r>
-              <a:rPr sz="9000" b="1">
+              <a:rPr sz="7725" b="1">
                 <a:solidFill>
                   <a:srgbClr val="FFFFFF"/>
                 </a:solidFill>
@@ -7407,7 +7407,7 @@
               </a:lnSpc>
             </a:pPr>
             <a:r>
-              <a:rPr sz="9000" b="1">
+              <a:rPr sz="7725" b="1">
                 <a:solidFill>
                   <a:srgbClr val="FFFFFF"/>
                 </a:solidFill>
@@ -7423,7 +7423,7 @@
               </a:lnSpc>
             </a:pPr>
             <a:r>
-              <a:rPr sz="9000" b="1">
+              <a:rPr sz="7725" b="1">
                 <a:solidFill>
                   <a:srgbClr val="FFFFFF"/>
                 </a:solidFill>
@@ -7442,7 +7442,7 @@
         </p:nvSpPr>
         <p:spPr>
           <a:xfrm>
-            <a:off x="666750" y="7239000"/>
+            <a:off x="666750" y="6498526"/>
             <a:ext cx="8953500" cy="1143000"/>
           </a:xfrm>
           <a:prstGeom prst="rect">

--- a/templates/04-panels.pptx
+++ b/templates/04-panels.pptx
@@ -3266,7 +3266,7 @@
                 </a:solidFill>
                 <a:latin typeface="Montserrat"/>
               </a:rPr>
-              <a:t>AES 2026  ·  PANELS</a:t>
+              <a:t>FOA 2026  ·  PANELS</a:t>
             </a:r>
           </a:p>
         </p:txBody>
@@ -3556,7 +3556,7 @@
                 </a:solidFill>
                 <a:latin typeface="Montserrat"/>
               </a:rPr>
-              <a:t>AES 2026  ·  PANELS</a:t>
+              <a:t>FOA 2026  ·  PANELS</a:t>
             </a:r>
           </a:p>
         </p:txBody>
@@ -3841,7 +3841,7 @@
                 </a:solidFill>
                 <a:latin typeface="Montserrat"/>
               </a:rPr>
-              <a:t>AES 2026  ·  PANELS</a:t>
+              <a:t>FOA 2026  ·  PANELS</a:t>
             </a:r>
           </a:p>
         </p:txBody>
@@ -4012,7 +4012,7 @@
                 </a:solidFill>
                 <a:latin typeface="Montserrat"/>
               </a:rPr>
-              <a:t>AES 2026  ·  PANELS</a:t>
+              <a:t>FOA 2026  ·  PANELS</a:t>
             </a:r>
           </a:p>
         </p:txBody>
